--- a/misc/field_push_mower.pptx
+++ b/misc/field_push_mower.pptx
@@ -6,6 +6,8 @@
   </p:sldMasterIdLst>
   <p:sldIdLst>
     <p:sldId id="256" r:id="rId2"/>
+    <p:sldId id="257" r:id="rId3"/>
+    <p:sldId id="258" r:id="rId4"/>
   </p:sldIdLst>
   <p:sldSz cx="12192000" cy="6858000"/>
   <p:notesSz cx="6858000" cy="9144000"/>
@@ -104,6 +106,11 @@
       </a:defRPr>
     </a:lvl9pPr>
   </p:defaultTextStyle>
+  <p:extLst>
+    <p:ext uri="{EFAFB233-063F-42B5-8137-9DF3F51BA10A}">
+      <p15:sldGuideLst xmlns:p15="http://schemas.microsoft.com/office/powerpoint/2012/main"/>
+    </p:ext>
+  </p:extLst>
 </p:presentation>
 </file>
 
@@ -254,7 +261,7 @@
           <a:p>
             <a:fld id="{644F7FD1-948C-2941-8783-30B897A74816}" type="datetimeFigureOut">
               <a:rPr lang="en-US" smtClean="0"/>
-              <a:t>6/15/23</a:t>
+              <a:t>5/26/24</a:t>
             </a:fld>
             <a:endParaRPr lang="en-US"/>
           </a:p>
@@ -452,7 +459,7 @@
           <a:p>
             <a:fld id="{644F7FD1-948C-2941-8783-30B897A74816}" type="datetimeFigureOut">
               <a:rPr lang="en-US" smtClean="0"/>
-              <a:t>6/15/23</a:t>
+              <a:t>5/26/24</a:t>
             </a:fld>
             <a:endParaRPr lang="en-US"/>
           </a:p>
@@ -660,7 +667,7 @@
           <a:p>
             <a:fld id="{644F7FD1-948C-2941-8783-30B897A74816}" type="datetimeFigureOut">
               <a:rPr lang="en-US" smtClean="0"/>
-              <a:t>6/15/23</a:t>
+              <a:t>5/26/24</a:t>
             </a:fld>
             <a:endParaRPr lang="en-US"/>
           </a:p>
@@ -858,7 +865,7 @@
           <a:p>
             <a:fld id="{644F7FD1-948C-2941-8783-30B897A74816}" type="datetimeFigureOut">
               <a:rPr lang="en-US" smtClean="0"/>
-              <a:t>6/15/23</a:t>
+              <a:t>5/26/24</a:t>
             </a:fld>
             <a:endParaRPr lang="en-US"/>
           </a:p>
@@ -1133,7 +1140,7 @@
           <a:p>
             <a:fld id="{644F7FD1-948C-2941-8783-30B897A74816}" type="datetimeFigureOut">
               <a:rPr lang="en-US" smtClean="0"/>
-              <a:t>6/15/23</a:t>
+              <a:t>5/26/24</a:t>
             </a:fld>
             <a:endParaRPr lang="en-US"/>
           </a:p>
@@ -1398,7 +1405,7 @@
           <a:p>
             <a:fld id="{644F7FD1-948C-2941-8783-30B897A74816}" type="datetimeFigureOut">
               <a:rPr lang="en-US" smtClean="0"/>
-              <a:t>6/15/23</a:t>
+              <a:t>5/26/24</a:t>
             </a:fld>
             <a:endParaRPr lang="en-US"/>
           </a:p>
@@ -1810,7 +1817,7 @@
           <a:p>
             <a:fld id="{644F7FD1-948C-2941-8783-30B897A74816}" type="datetimeFigureOut">
               <a:rPr lang="en-US" smtClean="0"/>
-              <a:t>6/15/23</a:t>
+              <a:t>5/26/24</a:t>
             </a:fld>
             <a:endParaRPr lang="en-US"/>
           </a:p>
@@ -1951,7 +1958,7 @@
           <a:p>
             <a:fld id="{644F7FD1-948C-2941-8783-30B897A74816}" type="datetimeFigureOut">
               <a:rPr lang="en-US" smtClean="0"/>
-              <a:t>6/15/23</a:t>
+              <a:t>5/26/24</a:t>
             </a:fld>
             <a:endParaRPr lang="en-US"/>
           </a:p>
@@ -2064,7 +2071,7 @@
           <a:p>
             <a:fld id="{644F7FD1-948C-2941-8783-30B897A74816}" type="datetimeFigureOut">
               <a:rPr lang="en-US" smtClean="0"/>
-              <a:t>6/15/23</a:t>
+              <a:t>5/26/24</a:t>
             </a:fld>
             <a:endParaRPr lang="en-US"/>
           </a:p>
@@ -2375,7 +2382,7 @@
           <a:p>
             <a:fld id="{644F7FD1-948C-2941-8783-30B897A74816}" type="datetimeFigureOut">
               <a:rPr lang="en-US" smtClean="0"/>
-              <a:t>6/15/23</a:t>
+              <a:t>5/26/24</a:t>
             </a:fld>
             <a:endParaRPr lang="en-US"/>
           </a:p>
@@ -2663,7 +2670,7 @@
           <a:p>
             <a:fld id="{644F7FD1-948C-2941-8783-30B897A74816}" type="datetimeFigureOut">
               <a:rPr lang="en-US" smtClean="0"/>
-              <a:t>6/15/23</a:t>
+              <a:t>5/26/24</a:t>
             </a:fld>
             <a:endParaRPr lang="en-US"/>
           </a:p>
@@ -2904,7 +2911,7 @@
           <a:p>
             <a:fld id="{644F7FD1-948C-2941-8783-30B897A74816}" type="datetimeFigureOut">
               <a:rPr lang="en-US" smtClean="0"/>
-              <a:t>6/15/23</a:t>
+              <a:t>5/26/24</a:t>
             </a:fld>
             <a:endParaRPr lang="en-US"/>
           </a:p>
@@ -3527,6 +3534,835 @@
 </p:sld>
 </file>
 
+<file path=ppt/slides/slide2.xml><?xml version="1.0" encoding="utf-8"?>
+<p:sld xmlns:a="http://schemas.openxmlformats.org/drawingml/2006/main" xmlns:r="http://schemas.openxmlformats.org/officeDocument/2006/relationships" xmlns:p="http://schemas.openxmlformats.org/presentationml/2006/main">
+  <p:cSld>
+    <p:spTree>
+      <p:nvGrpSpPr>
+        <p:cNvPr id="1" name=""/>
+        <p:cNvGrpSpPr/>
+        <p:nvPr/>
+      </p:nvGrpSpPr>
+      <p:grpSpPr>
+        <a:xfrm>
+          <a:off x="0" y="0"/>
+          <a:ext cx="0" cy="0"/>
+          <a:chOff x="0" y="0"/>
+          <a:chExt cx="0" cy="0"/>
+        </a:xfrm>
+      </p:grpSpPr>
+      <p:sp>
+        <p:nvSpPr>
+          <p:cNvPr id="5" name="TextBox 4">
+            <a:extLst>
+              <a:ext uri="{FF2B5EF4-FFF2-40B4-BE49-F238E27FC236}">
+                <a16:creationId xmlns:a16="http://schemas.microsoft.com/office/drawing/2014/main" id="{AE938EEE-C9ED-D767-51E8-5585BA433859}"/>
+              </a:ext>
+            </a:extLst>
+          </p:cNvPr>
+          <p:cNvSpPr txBox="1"/>
+          <p:nvPr/>
+        </p:nvSpPr>
+        <p:spPr>
+          <a:xfrm>
+            <a:off x="9318041" y="1828800"/>
+            <a:ext cx="2873959" cy="584775"/>
+          </a:xfrm>
+          <a:prstGeom prst="rect">
+            <a:avLst/>
+          </a:prstGeom>
+          <a:noFill/>
+        </p:spPr>
+        <p:txBody>
+          <a:bodyPr wrap="square" rtlCol="0">
+            <a:spAutoFit/>
+          </a:bodyPr>
+          <a:lstStyle/>
+          <a:p>
+            <a:r>
+              <a:rPr lang="en-US" sz="1200" dirty="0"/>
+              <a:t>Older model: DCMWSP244U2, $700</a:t>
+            </a:r>
+          </a:p>
+          <a:p>
+            <a:r>
+              <a:rPr lang="en-US" sz="1000" dirty="0">
+                <a:hlinkClick r:id="rId2"/>
+              </a:rPr>
+              <a:t>https://www.amazon.com/dp/B09MLL5878</a:t>
+            </a:r>
+            <a:endParaRPr lang="en-US" sz="1000" dirty="0"/>
+          </a:p>
+          <a:p>
+            <a:r>
+              <a:rPr lang="en-US" sz="1000" dirty="0">
+                <a:hlinkClick r:id="rId3"/>
+              </a:rPr>
+              <a:t>https://</a:t>
+            </a:r>
+            <a:r>
+              <a:rPr lang="en-US" sz="1000" dirty="0" err="1">
+                <a:hlinkClick r:id="rId3"/>
+              </a:rPr>
+              <a:t>www.youtube.com</a:t>
+            </a:r>
+            <a:r>
+              <a:rPr lang="en-US" sz="1000" dirty="0">
+                <a:hlinkClick r:id="rId3"/>
+              </a:rPr>
+              <a:t>/</a:t>
+            </a:r>
+            <a:r>
+              <a:rPr lang="en-US" sz="1000" dirty="0" err="1">
+                <a:hlinkClick r:id="rId3"/>
+              </a:rPr>
+              <a:t>watch?v</a:t>
+            </a:r>
+            <a:r>
+              <a:rPr lang="en-US" sz="1000" dirty="0">
+                <a:hlinkClick r:id="rId3"/>
+              </a:rPr>
+              <a:t>=al5DQLz1HrA</a:t>
+            </a:r>
+            <a:endParaRPr lang="en-US" sz="1000" dirty="0"/>
+          </a:p>
+        </p:txBody>
+      </p:sp>
+      <p:sp>
+        <p:nvSpPr>
+          <p:cNvPr id="6" name="TextBox 5">
+            <a:extLst>
+              <a:ext uri="{FF2B5EF4-FFF2-40B4-BE49-F238E27FC236}">
+                <a16:creationId xmlns:a16="http://schemas.microsoft.com/office/drawing/2014/main" id="{4FFB5C02-1BD6-3DF5-C5B1-A013629FACCC}"/>
+              </a:ext>
+            </a:extLst>
+          </p:cNvPr>
+          <p:cNvSpPr txBox="1"/>
+          <p:nvPr/>
+        </p:nvSpPr>
+        <p:spPr>
+          <a:xfrm>
+            <a:off x="205572" y="5059740"/>
+            <a:ext cx="4488108" cy="1569660"/>
+          </a:xfrm>
+          <a:prstGeom prst="rect">
+            <a:avLst/>
+          </a:prstGeom>
+          <a:noFill/>
+        </p:spPr>
+        <p:txBody>
+          <a:bodyPr wrap="square" rtlCol="0">
+            <a:spAutoFit/>
+          </a:bodyPr>
+          <a:lstStyle/>
+          <a:p>
+            <a:r>
+              <a:rPr lang="en-US" sz="1200" b="0" i="0" dirty="0">
+                <a:solidFill>
+                  <a:srgbClr val="0F1111"/>
+                </a:solidFill>
+                <a:effectLst/>
+              </a:rPr>
+              <a:t>New in 2024 - Model </a:t>
+            </a:r>
+            <a:r>
+              <a:rPr lang="en-US" sz="1200" b="1" i="0" dirty="0">
+                <a:solidFill>
+                  <a:srgbClr val="FF0000"/>
+                </a:solidFill>
+                <a:effectLst/>
+              </a:rPr>
+              <a:t>DCMWSP256U2</a:t>
+            </a:r>
+            <a:r>
+              <a:rPr lang="en-US" sz="1200" b="0" i="0" dirty="0">
+                <a:solidFill>
+                  <a:srgbClr val="0F1111"/>
+                </a:solidFill>
+                <a:effectLst/>
+              </a:rPr>
+              <a:t> </a:t>
+            </a:r>
+            <a:r>
+              <a:rPr lang="en-US" sz="1200" b="0" i="0" dirty="0">
+                <a:solidFill>
+                  <a:srgbClr val="FF0000"/>
+                </a:solidFill>
+                <a:effectLst/>
+              </a:rPr>
+              <a:t>- $650 - $700</a:t>
+            </a:r>
+          </a:p>
+          <a:p>
+            <a:r>
+              <a:rPr lang="en-US" sz="1200" dirty="0">
+                <a:solidFill>
+                  <a:srgbClr val="0F1111"/>
+                </a:solidFill>
+              </a:rPr>
+              <a:t>21.5" self-propelled, has side-discharge and bag</a:t>
+            </a:r>
+          </a:p>
+          <a:p>
+            <a:r>
+              <a:rPr lang="en-US" sz="1200" dirty="0">
+                <a:solidFill>
+                  <a:srgbClr val="0F1111"/>
+                </a:solidFill>
+              </a:rPr>
+              <a:t>includes two 20V  batteries and two charges</a:t>
+            </a:r>
+          </a:p>
+          <a:p>
+            <a:r>
+              <a:rPr lang="en-US" sz="1200" dirty="0">
+                <a:solidFill>
+                  <a:srgbClr val="0F1111"/>
+                </a:solidFill>
+              </a:rPr>
+              <a:t>very quiet</a:t>
+            </a:r>
+          </a:p>
+          <a:p>
+            <a:r>
+              <a:rPr lang="en-US" sz="1200" dirty="0">
+                <a:solidFill>
+                  <a:srgbClr val="0F1111"/>
+                </a:solidFill>
+              </a:rPr>
+              <a:t>.. </a:t>
+            </a:r>
+            <a:r>
+              <a:rPr lang="en-US" sz="1200" b="0" i="0" dirty="0">
+                <a:solidFill>
+                  <a:srgbClr val="0F1111"/>
+                </a:solidFill>
+                <a:effectLst/>
+                <a:hlinkClick r:id="rId4"/>
+              </a:rPr>
+              <a:t>https://www.amazon.com/dp/B0CVN88DQ9/</a:t>
+            </a:r>
+            <a:endParaRPr lang="en-US" sz="1200" b="0" i="0" dirty="0">
+              <a:solidFill>
+                <a:srgbClr val="0F1111"/>
+              </a:solidFill>
+              <a:effectLst/>
+            </a:endParaRPr>
+          </a:p>
+          <a:p>
+            <a:r>
+              <a:rPr lang="en-US" sz="1200" dirty="0"/>
+              <a:t>.. </a:t>
+            </a:r>
+            <a:r>
+              <a:rPr lang="en-US" sz="1200" dirty="0">
+                <a:hlinkClick r:id="rId5"/>
+              </a:rPr>
+              <a:t>https://www.homedepot.com/p/DEWALT-20V-MAX-21-in-Brushless-Cordless-Battery-Powered-Self-Propelled-Lawn-Mower-Kit-with-2-10-Ah-Batteries-Chargers-DCMWSP256U2/326465401</a:t>
+            </a:r>
+            <a:endParaRPr lang="en-US" sz="1200" dirty="0"/>
+          </a:p>
+        </p:txBody>
+      </p:sp>
+      <p:pic>
+        <p:nvPicPr>
+          <p:cNvPr id="2" name="Picture 1">
+            <a:extLst>
+              <a:ext uri="{FF2B5EF4-FFF2-40B4-BE49-F238E27FC236}">
+                <a16:creationId xmlns:a16="http://schemas.microsoft.com/office/drawing/2014/main" id="{8DAC186A-1A54-E8FF-94C4-1B8A448F1B63}"/>
+              </a:ext>
+            </a:extLst>
+          </p:cNvPr>
+          <p:cNvPicPr>
+            <a:picLocks noChangeAspect="1"/>
+          </p:cNvPicPr>
+          <p:nvPr/>
+        </p:nvPicPr>
+        <p:blipFill>
+          <a:blip r:embed="rId6" cstate="email">
+            <a:extLst>
+              <a:ext uri="{28A0092B-C50C-407E-A947-70E740481C1C}">
+                <a14:useLocalDpi xmlns:a14="http://schemas.microsoft.com/office/drawing/2010/main"/>
+              </a:ext>
+            </a:extLst>
+          </a:blip>
+          <a:stretch>
+            <a:fillRect/>
+          </a:stretch>
+        </p:blipFill>
+        <p:spPr>
+          <a:xfrm>
+            <a:off x="9829800" y="251930"/>
+            <a:ext cx="1539505" cy="1477340"/>
+          </a:xfrm>
+          <a:prstGeom prst="rect">
+            <a:avLst/>
+          </a:prstGeom>
+        </p:spPr>
+      </p:pic>
+      <p:pic>
+        <p:nvPicPr>
+          <p:cNvPr id="3" name="Picture 2">
+            <a:extLst>
+              <a:ext uri="{FF2B5EF4-FFF2-40B4-BE49-F238E27FC236}">
+                <a16:creationId xmlns:a16="http://schemas.microsoft.com/office/drawing/2014/main" id="{A8221FC0-0F87-6423-DC0A-E17DCD9CC5B4}"/>
+              </a:ext>
+            </a:extLst>
+          </p:cNvPr>
+          <p:cNvPicPr>
+            <a:picLocks noChangeAspect="1"/>
+          </p:cNvPicPr>
+          <p:nvPr/>
+        </p:nvPicPr>
+        <p:blipFill>
+          <a:blip r:embed="rId7" cstate="email">
+            <a:extLst>
+              <a:ext uri="{28A0092B-C50C-407E-A947-70E740481C1C}">
+                <a14:useLocalDpi xmlns:a14="http://schemas.microsoft.com/office/drawing/2010/main"/>
+              </a:ext>
+            </a:extLst>
+          </a:blip>
+          <a:stretch>
+            <a:fillRect/>
+          </a:stretch>
+        </p:blipFill>
+        <p:spPr>
+          <a:xfrm>
+            <a:off x="200317" y="752862"/>
+            <a:ext cx="4488108" cy="4306878"/>
+          </a:xfrm>
+          <a:prstGeom prst="rect">
+            <a:avLst/>
+          </a:prstGeom>
+        </p:spPr>
+      </p:pic>
+      <p:sp>
+        <p:nvSpPr>
+          <p:cNvPr id="8" name="TextBox 7">
+            <a:extLst>
+              <a:ext uri="{FF2B5EF4-FFF2-40B4-BE49-F238E27FC236}">
+                <a16:creationId xmlns:a16="http://schemas.microsoft.com/office/drawing/2014/main" id="{0ABBDE9D-E5B2-1792-7A9E-EFDCF5C9BE16}"/>
+              </a:ext>
+            </a:extLst>
+          </p:cNvPr>
+          <p:cNvSpPr txBox="1"/>
+          <p:nvPr/>
+        </p:nvSpPr>
+        <p:spPr>
+          <a:xfrm>
+            <a:off x="5414610" y="3896197"/>
+            <a:ext cx="3576990" cy="1600438"/>
+          </a:xfrm>
+          <a:prstGeom prst="rect">
+            <a:avLst/>
+          </a:prstGeom>
+          <a:noFill/>
+        </p:spPr>
+        <p:txBody>
+          <a:bodyPr wrap="square" rtlCol="0">
+            <a:spAutoFit/>
+          </a:bodyPr>
+          <a:lstStyle/>
+          <a:p>
+            <a:pPr algn="l"/>
+            <a:r>
+              <a:rPr lang="en-US" sz="1200" b="0" i="0" dirty="0">
+                <a:solidFill>
+                  <a:srgbClr val="0F1111"/>
+                </a:solidFill>
+                <a:effectLst/>
+                <a:latin typeface="Calibri" panose="020F0502020204030204" pitchFamily="34" charset="0"/>
+                <a:cs typeface="Calibri" panose="020F0502020204030204" pitchFamily="34" charset="0"/>
+              </a:rPr>
+              <a:t>New in 2024 – Model </a:t>
+            </a:r>
+            <a:r>
+              <a:rPr lang="en-US" sz="1200" b="1" i="0" dirty="0">
+                <a:solidFill>
+                  <a:srgbClr val="FF0000"/>
+                </a:solidFill>
+                <a:effectLst/>
+                <a:latin typeface="Calibri" panose="020F0502020204030204" pitchFamily="34" charset="0"/>
+                <a:cs typeface="Calibri" panose="020F0502020204030204" pitchFamily="34" charset="0"/>
+              </a:rPr>
+              <a:t>DCMWSP650Y2</a:t>
+            </a:r>
+            <a:r>
+              <a:rPr lang="en-US" sz="1200" b="0" i="0" dirty="0">
+                <a:solidFill>
+                  <a:srgbClr val="FF0000"/>
+                </a:solidFill>
+                <a:effectLst/>
+              </a:rPr>
+              <a:t> - $1,200</a:t>
+            </a:r>
+            <a:endParaRPr lang="en-US" sz="1200" b="1" i="0" dirty="0">
+              <a:solidFill>
+                <a:srgbClr val="FF0000"/>
+              </a:solidFill>
+              <a:effectLst/>
+              <a:latin typeface="Calibri" panose="020F0502020204030204" pitchFamily="34" charset="0"/>
+              <a:cs typeface="Calibri" panose="020F0502020204030204" pitchFamily="34" charset="0"/>
+            </a:endParaRPr>
+          </a:p>
+          <a:p>
+            <a:pPr algn="l"/>
+            <a:r>
+              <a:rPr lang="en-US" sz="1200" dirty="0">
+                <a:solidFill>
+                  <a:srgbClr val="0F1111"/>
+                </a:solidFill>
+                <a:highlight>
+                  <a:srgbClr val="FFFFFF"/>
+                </a:highlight>
+                <a:latin typeface="Calibri" panose="020F0502020204030204" pitchFamily="34" charset="0"/>
+                <a:cs typeface="Calibri" panose="020F0502020204030204" pitchFamily="34" charset="0"/>
+              </a:rPr>
+              <a:t>21.5" self-propelled, has side discharge and bag</a:t>
+            </a:r>
+          </a:p>
+          <a:p>
+            <a:pPr algn="l"/>
+            <a:r>
+              <a:rPr lang="en-US" sz="1200" dirty="0">
+                <a:solidFill>
+                  <a:srgbClr val="0F1111"/>
+                </a:solidFill>
+                <a:highlight>
+                  <a:srgbClr val="FFFFFF"/>
+                </a:highlight>
+                <a:latin typeface="Calibri" panose="020F0502020204030204" pitchFamily="34" charset="0"/>
+                <a:cs typeface="Calibri" panose="020F0502020204030204" pitchFamily="34" charset="0"/>
+              </a:rPr>
+              <a:t>includes two 60V 12amp batteries and 2 charges</a:t>
+            </a:r>
+          </a:p>
+          <a:p>
+            <a:pPr algn="l"/>
+            <a:r>
+              <a:rPr lang="en-US" sz="1200" dirty="0">
+                <a:solidFill>
+                  <a:srgbClr val="0F1111"/>
+                </a:solidFill>
+                <a:highlight>
+                  <a:srgbClr val="FFFFFF"/>
+                </a:highlight>
+                <a:latin typeface="Calibri" panose="020F0502020204030204" pitchFamily="34" charset="0"/>
+                <a:cs typeface="Calibri" panose="020F0502020204030204" pitchFamily="34" charset="0"/>
+              </a:rPr>
+              <a:t>.. </a:t>
+            </a:r>
+            <a:r>
+              <a:rPr lang="en-US" sz="1000" dirty="0">
+                <a:solidFill>
+                  <a:srgbClr val="0F1111"/>
+                </a:solidFill>
+                <a:highlight>
+                  <a:srgbClr val="FFFFFF"/>
+                </a:highlight>
+                <a:latin typeface="Calibri" panose="020F0502020204030204" pitchFamily="34" charset="0"/>
+                <a:cs typeface="Calibri" panose="020F0502020204030204" pitchFamily="34" charset="0"/>
+                <a:hlinkClick r:id="rId8"/>
+              </a:rPr>
+              <a:t>https://www.youtube.com/watch?v=apEP0-2sicE</a:t>
+            </a:r>
+            <a:r>
+              <a:rPr lang="en-US" sz="1000" dirty="0">
+                <a:solidFill>
+                  <a:srgbClr val="0F1111"/>
+                </a:solidFill>
+                <a:highlight>
+                  <a:srgbClr val="FFFFFF"/>
+                </a:highlight>
+                <a:latin typeface="Calibri" panose="020F0502020204030204" pitchFamily="34" charset="0"/>
+                <a:cs typeface="Calibri" panose="020F0502020204030204" pitchFamily="34" charset="0"/>
+              </a:rPr>
+              <a:t> </a:t>
+            </a:r>
+          </a:p>
+          <a:p>
+            <a:pPr algn="l"/>
+            <a:r>
+              <a:rPr lang="en-US" sz="1000" dirty="0">
+                <a:solidFill>
+                  <a:srgbClr val="0F1111"/>
+                </a:solidFill>
+                <a:highlight>
+                  <a:srgbClr val="FFFFFF"/>
+                </a:highlight>
+                <a:latin typeface="Calibri" panose="020F0502020204030204" pitchFamily="34" charset="0"/>
+                <a:cs typeface="Calibri" panose="020F0502020204030204" pitchFamily="34" charset="0"/>
+              </a:rPr>
+              <a:t>.. </a:t>
+            </a:r>
+            <a:r>
+              <a:rPr lang="en-US" sz="1000" dirty="0">
+                <a:solidFill>
+                  <a:srgbClr val="0F1111"/>
+                </a:solidFill>
+                <a:highlight>
+                  <a:srgbClr val="FFFFFF"/>
+                </a:highlight>
+                <a:latin typeface="Calibri" panose="020F0502020204030204" pitchFamily="34" charset="0"/>
+                <a:cs typeface="Calibri" panose="020F0502020204030204" pitchFamily="34" charset="0"/>
+                <a:hlinkClick r:id="rId9"/>
+              </a:rPr>
+              <a:t>https://www.dewalt.com/product/dcmwsp650y2/dewalt-60v-max-cordless-brushless-rwd-self-propelled-mower-kit</a:t>
+            </a:r>
+            <a:r>
+              <a:rPr lang="en-US" sz="1000" dirty="0">
+                <a:solidFill>
+                  <a:srgbClr val="0F1111"/>
+                </a:solidFill>
+                <a:highlight>
+                  <a:srgbClr val="FFFFFF"/>
+                </a:highlight>
+                <a:latin typeface="Calibri" panose="020F0502020204030204" pitchFamily="34" charset="0"/>
+                <a:cs typeface="Calibri" panose="020F0502020204030204" pitchFamily="34" charset="0"/>
+              </a:rPr>
+              <a:t> </a:t>
+            </a:r>
+          </a:p>
+          <a:p>
+            <a:pPr algn="l"/>
+            <a:r>
+              <a:rPr lang="en-US" sz="1000" dirty="0">
+                <a:solidFill>
+                  <a:srgbClr val="0F1111"/>
+                </a:solidFill>
+                <a:highlight>
+                  <a:srgbClr val="FFFFFF"/>
+                </a:highlight>
+                <a:latin typeface="Calibri" panose="020F0502020204030204" pitchFamily="34" charset="0"/>
+                <a:cs typeface="Calibri" panose="020F0502020204030204" pitchFamily="34" charset="0"/>
+              </a:rPr>
+              <a:t>..</a:t>
+            </a:r>
+            <a:r>
+              <a:rPr lang="en-US" sz="1000" dirty="0">
+                <a:solidFill>
+                  <a:srgbClr val="0F1111"/>
+                </a:solidFill>
+                <a:highlight>
+                  <a:srgbClr val="FFFFFF"/>
+                </a:highlight>
+                <a:latin typeface="Calibri" panose="020F0502020204030204" pitchFamily="34" charset="0"/>
+                <a:cs typeface="Calibri" panose="020F0502020204030204" pitchFamily="34" charset="0"/>
+                <a:hlinkClick r:id="rId10"/>
+              </a:rPr>
+              <a:t> https://</a:t>
+            </a:r>
+            <a:r>
+              <a:rPr lang="en-US" sz="1000" dirty="0" err="1">
+                <a:solidFill>
+                  <a:srgbClr val="0F1111"/>
+                </a:solidFill>
+                <a:highlight>
+                  <a:srgbClr val="FFFFFF"/>
+                </a:highlight>
+                <a:latin typeface="Calibri" panose="020F0502020204030204" pitchFamily="34" charset="0"/>
+                <a:cs typeface="Calibri" panose="020F0502020204030204" pitchFamily="34" charset="0"/>
+                <a:hlinkClick r:id="rId10"/>
+              </a:rPr>
+              <a:t>www.homedepot.ca</a:t>
+            </a:r>
+            <a:r>
+              <a:rPr lang="en-US" sz="1000" dirty="0">
+                <a:solidFill>
+                  <a:srgbClr val="0F1111"/>
+                </a:solidFill>
+                <a:highlight>
+                  <a:srgbClr val="FFFFFF"/>
+                </a:highlight>
+                <a:latin typeface="Calibri" panose="020F0502020204030204" pitchFamily="34" charset="0"/>
+                <a:cs typeface="Calibri" panose="020F0502020204030204" pitchFamily="34" charset="0"/>
+                <a:hlinkClick r:id="rId10"/>
+              </a:rPr>
+              <a:t>/product/dewalt-2x60v-max-flexvolt-brushless-21-5-in-rear-wheel-drive-self-propelled-mower-with-2-12ah-batteries/1001824470</a:t>
+            </a:r>
+            <a:endParaRPr lang="en-US" sz="1000" dirty="0">
+              <a:solidFill>
+                <a:srgbClr val="0F1111"/>
+              </a:solidFill>
+              <a:highlight>
+                <a:srgbClr val="FFFFFF"/>
+              </a:highlight>
+              <a:latin typeface="Calibri" panose="020F0502020204030204" pitchFamily="34" charset="0"/>
+              <a:cs typeface="Calibri" panose="020F0502020204030204" pitchFamily="34" charset="0"/>
+            </a:endParaRPr>
+          </a:p>
+        </p:txBody>
+      </p:sp>
+      <p:pic>
+        <p:nvPicPr>
+          <p:cNvPr id="10" name="Picture 9">
+            <a:extLst>
+              <a:ext uri="{FF2B5EF4-FFF2-40B4-BE49-F238E27FC236}">
+                <a16:creationId xmlns:a16="http://schemas.microsoft.com/office/drawing/2014/main" id="{887363A9-BB51-1D16-B1A6-98C9B3F47166}"/>
+              </a:ext>
+            </a:extLst>
+          </p:cNvPr>
+          <p:cNvPicPr>
+            <a:picLocks noChangeAspect="1"/>
+          </p:cNvPicPr>
+          <p:nvPr/>
+        </p:nvPicPr>
+        <p:blipFill>
+          <a:blip r:embed="rId11" cstate="email">
+            <a:extLst>
+              <a:ext uri="{28A0092B-C50C-407E-A947-70E740481C1C}">
+                <a14:useLocalDpi xmlns:a14="http://schemas.microsoft.com/office/drawing/2010/main"/>
+              </a:ext>
+            </a:extLst>
+          </a:blip>
+          <a:stretch>
+            <a:fillRect/>
+          </a:stretch>
+        </p:blipFill>
+        <p:spPr>
+          <a:xfrm>
+            <a:off x="5414610" y="990600"/>
+            <a:ext cx="3308004" cy="2641600"/>
+          </a:xfrm>
+          <a:prstGeom prst="rect">
+            <a:avLst/>
+          </a:prstGeom>
+        </p:spPr>
+      </p:pic>
+    </p:spTree>
+    <p:extLst>
+      <p:ext uri="{BB962C8B-B14F-4D97-AF65-F5344CB8AC3E}">
+        <p14:creationId xmlns:p14="http://schemas.microsoft.com/office/powerpoint/2010/main" val="360386907"/>
+      </p:ext>
+    </p:extLst>
+  </p:cSld>
+  <p:clrMapOvr>
+    <a:masterClrMapping/>
+  </p:clrMapOvr>
+</p:sld>
+</file>
+
+<file path=ppt/slides/slide3.xml><?xml version="1.0" encoding="utf-8"?>
+<p:sld xmlns:a="http://schemas.openxmlformats.org/drawingml/2006/main" xmlns:r="http://schemas.openxmlformats.org/officeDocument/2006/relationships" xmlns:p="http://schemas.openxmlformats.org/presentationml/2006/main">
+  <p:cSld>
+    <p:spTree>
+      <p:nvGrpSpPr>
+        <p:cNvPr id="1" name=""/>
+        <p:cNvGrpSpPr/>
+        <p:nvPr/>
+      </p:nvGrpSpPr>
+      <p:grpSpPr>
+        <a:xfrm>
+          <a:off x="0" y="0"/>
+          <a:ext cx="0" cy="0"/>
+          <a:chOff x="0" y="0"/>
+          <a:chExt cx="0" cy="0"/>
+        </a:xfrm>
+      </p:grpSpPr>
+      <p:pic>
+        <p:nvPicPr>
+          <p:cNvPr id="4" name="Picture 3">
+            <a:extLst>
+              <a:ext uri="{FF2B5EF4-FFF2-40B4-BE49-F238E27FC236}">
+                <a16:creationId xmlns:a16="http://schemas.microsoft.com/office/drawing/2014/main" id="{AC2A4C74-191C-D40A-DEC9-516966CD51E5}"/>
+              </a:ext>
+            </a:extLst>
+          </p:cNvPr>
+          <p:cNvPicPr>
+            <a:picLocks noChangeAspect="1"/>
+          </p:cNvPicPr>
+          <p:nvPr/>
+        </p:nvPicPr>
+        <p:blipFill>
+          <a:blip r:embed="rId2" cstate="email">
+            <a:extLst>
+              <a:ext uri="{28A0092B-C50C-407E-A947-70E740481C1C}">
+                <a14:useLocalDpi xmlns:a14="http://schemas.microsoft.com/office/drawing/2010/main"/>
+              </a:ext>
+            </a:extLst>
+          </a:blip>
+          <a:stretch>
+            <a:fillRect/>
+          </a:stretch>
+        </p:blipFill>
+        <p:spPr>
+          <a:xfrm>
+            <a:off x="152400" y="152400"/>
+            <a:ext cx="3532300" cy="3938817"/>
+          </a:xfrm>
+          <a:prstGeom prst="rect">
+            <a:avLst/>
+          </a:prstGeom>
+        </p:spPr>
+      </p:pic>
+      <p:sp>
+        <p:nvSpPr>
+          <p:cNvPr id="7" name="TextBox 6">
+            <a:extLst>
+              <a:ext uri="{FF2B5EF4-FFF2-40B4-BE49-F238E27FC236}">
+                <a16:creationId xmlns:a16="http://schemas.microsoft.com/office/drawing/2014/main" id="{3992A181-2699-EC5C-FC5D-733D43ECFE72}"/>
+              </a:ext>
+            </a:extLst>
+          </p:cNvPr>
+          <p:cNvSpPr txBox="1"/>
+          <p:nvPr/>
+        </p:nvSpPr>
+        <p:spPr>
+          <a:xfrm>
+            <a:off x="178676" y="4267200"/>
+            <a:ext cx="3532300" cy="1508105"/>
+          </a:xfrm>
+          <a:prstGeom prst="rect">
+            <a:avLst/>
+          </a:prstGeom>
+          <a:noFill/>
+        </p:spPr>
+        <p:txBody>
+          <a:bodyPr wrap="square">
+            <a:spAutoFit/>
+          </a:bodyPr>
+          <a:lstStyle/>
+          <a:p>
+            <a:r>
+              <a:rPr lang="en-US" sz="1200" dirty="0"/>
+              <a:t>Craftsman gas mower</a:t>
+            </a:r>
+          </a:p>
+          <a:p>
+            <a:r>
+              <a:rPr lang="en-US" sz="1200" dirty="0"/>
+              <a:t>Model 917.376733</a:t>
+            </a:r>
+          </a:p>
+          <a:p>
+            <a:r>
+              <a:rPr lang="en-US" sz="1200" dirty="0"/>
+              <a:t>22" cut</a:t>
+            </a:r>
+          </a:p>
+          <a:p>
+            <a:r>
+              <a:rPr lang="en-US" sz="1200" dirty="0"/>
+              <a:t>Briggs &amp; Stratton engine</a:t>
+            </a:r>
+          </a:p>
+          <a:p>
+            <a:endParaRPr lang="en-US" sz="1200" dirty="0"/>
+          </a:p>
+          <a:p>
+            <a:r>
+              <a:rPr lang="en-US" sz="1200" dirty="0"/>
+              <a:t>Manual:</a:t>
+            </a:r>
+          </a:p>
+          <a:p>
+            <a:r>
+              <a:rPr lang="en-US" sz="1000" dirty="0">
+                <a:hlinkClick r:id="rId3"/>
+              </a:rPr>
+              <a:t>https://</a:t>
+            </a:r>
+            <a:r>
+              <a:rPr lang="en-US" sz="1000" dirty="0" err="1">
+                <a:hlinkClick r:id="rId3"/>
+              </a:rPr>
+              <a:t>www.searspartsdirect.com</a:t>
+            </a:r>
+            <a:r>
+              <a:rPr lang="en-US" sz="1000" dirty="0">
+                <a:hlinkClick r:id="rId3"/>
+              </a:rPr>
+              <a:t>/manual/1p048hkgcs-000247/craftsman-917376733-gas-walk-behind-mower-parts </a:t>
+            </a:r>
+            <a:endParaRPr lang="en-US" sz="1000" dirty="0"/>
+          </a:p>
+        </p:txBody>
+      </p:sp>
+      <p:pic>
+        <p:nvPicPr>
+          <p:cNvPr id="8" name="Picture 7">
+            <a:extLst>
+              <a:ext uri="{FF2B5EF4-FFF2-40B4-BE49-F238E27FC236}">
+                <a16:creationId xmlns:a16="http://schemas.microsoft.com/office/drawing/2014/main" id="{B9471943-CF0E-1955-018C-302FA13A98B6}"/>
+              </a:ext>
+            </a:extLst>
+          </p:cNvPr>
+          <p:cNvPicPr>
+            <a:picLocks noChangeAspect="1"/>
+          </p:cNvPicPr>
+          <p:nvPr/>
+        </p:nvPicPr>
+        <p:blipFill>
+          <a:blip r:embed="rId4" cstate="email">
+            <a:extLst>
+              <a:ext uri="{28A0092B-C50C-407E-A947-70E740481C1C}">
+                <a14:useLocalDpi xmlns:a14="http://schemas.microsoft.com/office/drawing/2010/main"/>
+              </a:ext>
+            </a:extLst>
+          </a:blip>
+          <a:stretch>
+            <a:fillRect/>
+          </a:stretch>
+        </p:blipFill>
+        <p:spPr>
+          <a:xfrm rot="10800000">
+            <a:off x="5684372" y="3810000"/>
+            <a:ext cx="6507628" cy="3029927"/>
+          </a:xfrm>
+          <a:prstGeom prst="rect">
+            <a:avLst/>
+          </a:prstGeom>
+        </p:spPr>
+      </p:pic>
+      <p:pic>
+        <p:nvPicPr>
+          <p:cNvPr id="9" name="Picture 8">
+            <a:extLst>
+              <a:ext uri="{FF2B5EF4-FFF2-40B4-BE49-F238E27FC236}">
+                <a16:creationId xmlns:a16="http://schemas.microsoft.com/office/drawing/2014/main" id="{9F93D3DA-A86A-CCAF-DBD5-BB878C8A350A}"/>
+              </a:ext>
+            </a:extLst>
+          </p:cNvPr>
+          <p:cNvPicPr>
+            <a:picLocks noChangeAspect="1"/>
+          </p:cNvPicPr>
+          <p:nvPr/>
+        </p:nvPicPr>
+        <p:blipFill>
+          <a:blip r:embed="rId5" cstate="email">
+            <a:extLst>
+              <a:ext uri="{28A0092B-C50C-407E-A947-70E740481C1C}">
+                <a14:useLocalDpi xmlns:a14="http://schemas.microsoft.com/office/drawing/2010/main"/>
+              </a:ext>
+            </a:extLst>
+          </a:blip>
+          <a:stretch>
+            <a:fillRect/>
+          </a:stretch>
+        </p:blipFill>
+        <p:spPr>
+          <a:xfrm>
+            <a:off x="8205350" y="117098"/>
+            <a:ext cx="3852643" cy="4201921"/>
+          </a:xfrm>
+          <a:prstGeom prst="rect">
+            <a:avLst/>
+          </a:prstGeom>
+        </p:spPr>
+      </p:pic>
+    </p:spTree>
+    <p:extLst>
+      <p:ext uri="{BB962C8B-B14F-4D97-AF65-F5344CB8AC3E}">
+        <p14:creationId xmlns:p14="http://schemas.microsoft.com/office/powerpoint/2010/main" val="2067465228"/>
+      </p:ext>
+    </p:extLst>
+  </p:cSld>
+  <p:clrMapOvr>
+    <a:masterClrMapping/>
+  </p:clrMapOvr>
+</p:sld>
+</file>
+
 <file path=ppt/theme/theme1.xml><?xml version="1.0" encoding="utf-8"?>
 <a:theme xmlns:a="http://schemas.openxmlformats.org/drawingml/2006/main" name="Office Theme">
   <a:themeElements>
